--- a/docs/proposals/softbank-ultraman-caravan/ウルトラマンIPご活用のご提案とお見積り.pptx
+++ b/docs/proposals/softbank-ultraman-caravan/ウルトラマンIPご活用のご提案とお見積り.pptx
@@ -10,6 +10,8 @@
     <p:sldId id="258" r:id="rId9"/>
     <p:sldId id="259" r:id="rId10"/>
     <p:sldId id="260" r:id="rId11"/>
+    <p:sldId id="261" r:id="rId12"/>
+    <p:sldId id="262" r:id="rId13"/>
   </p:sldIdLst>
   <p:sldSz cx="12191695" cy="6858000" type="screen4x3"/>
   <p:notesSz cx="6858000" cy="9144000"/>
@@ -3797,7 +3799,7 @@
                           <a:latin typeface="Meiryo"/>
                           <a:ea typeface="Meiryo"/>
                         </a:rPr>
-                        <a:t>イベント・イベントキット・店頭訴求ツール・LP/Web・SNSでのIP利用と作成物の監修対応を包括。着ぐるみイベントの開催権を含みます</a:t>
+                        <a:t>イベント・イベントキット・店頭訴求ツール・LP/Web・SNSでのIP利用と作成物の監修対応を包括。着ぐるみイベントの開催権利を含みます</a:t>
                       </a:r>
                     </a:p>
                   </a:txBody>
@@ -3820,7 +3822,19 @@
                           <a:latin typeface="Meiryo"/>
                           <a:ea typeface="Meiryo"/>
                         </a:rPr>
-                        <a:t>2,000万円/年</a:t>
+                        <a:t>初年度特別 2,000万円/年</a:t>
+                      </a:r>
+                    </a:p>
+                    <a:p>
+                      <a:r>
+                        <a:rPr sz="1200" b="1">
+                          <a:solidFill>
+                            <a:srgbClr val="C00000"/>
+                          </a:solidFill>
+                          <a:latin typeface="Meiryo"/>
+                          <a:ea typeface="Meiryo"/>
+                        </a:rPr>
+                        <a:t>通常 2,400万円/年</a:t>
                       </a:r>
                     </a:p>
                   </a:txBody>
@@ -4095,23 +4109,6 @@
               <a:t>・着ぐるみは1回30分×1日最大5回、1回あたり約50組にご対応可能。キャラクター登場時のBGM音素材もご用意します</a:t>
             </a:r>
           </a:p>
-          <a:p>
-            <a:pPr algn="l">
-              <a:spcAft>
-                <a:spcPts val="500"/>
-              </a:spcAft>
-            </a:pPr>
-            <a:r>
-              <a:rPr sz="1200" b="0">
-                <a:solidFill>
-                  <a:srgbClr val="1A1A1A"/>
-                </a:solidFill>
-                <a:latin typeface="Meiryo"/>
-                <a:ea typeface="Meiryo"/>
-              </a:rPr>
-              <a:t>・ステージショーをご希望の場合は年10回程度まで対応可能です(1回30万円〜・個別お見積り)</a:t>
-            </a:r>
-          </a:p>
         </p:txBody>
       </p:sp>
       <p:sp>
@@ -4149,7 +4146,7 @@
                 <a:latin typeface="Meiryo"/>
                 <a:ea typeface="Meiryo"/>
               </a:rPr>
-              <a:t>※②は首都圏内は交通実費込みの特別条件、首都圏外は交通・宿泊実費を別途申し受けます。※控室(非公開の着替え場所)のご用意など、実施ルールの詳細は別紙レギュレーションをご参照ください。</a:t>
+              <a:t>※着ぐるみ運搬・交通・宿泊費、スタッフ昼食費等の実費を別途申し受けます。※控室(非公開の着替え場所)のご用意など、実施ルールの詳細は別紙レギュレーションをご参照ください。</a:t>
             </a:r>
           </a:p>
         </p:txBody>
@@ -4511,7 +4508,7 @@
                 <a:latin typeface="Meiryo"/>
                 <a:ea typeface="Meiryo"/>
               </a:rPr>
-              <a:t>(初代/セブン/ティガ/ダイナ/ゼロ/アーク/オメガ/テオ)</a:t>
+              <a:t>(初代ウルトラマン/タロウ/ティガ/ダイナ/ゼロ/アーク/オメガ/テオ)</a:t>
             </a:r>
           </a:p>
           <a:p>
@@ -4614,7 +4611,7 @@
                 <a:latin typeface="Meiryo"/>
                 <a:ea typeface="Meiryo"/>
               </a:rPr>
-              <a:t>2. 夏も稼働できる唯一の選択肢</a:t>
+              <a:t>2. 繁忙期の夏休み商戦も全力稼働</a:t>
             </a:r>
           </a:p>
           <a:p>
@@ -4888,7 +4885,7 @@
                 <a:latin typeface="Meiryo"/>
                 <a:ea typeface="Meiryo"/>
               </a:rPr>
-              <a:t>4. ヒーローショー水準の運用品質</a:t>
+              <a:t>4. 高いイベント運用品質</a:t>
             </a:r>
           </a:p>
           <a:p>
@@ -4922,24 +4919,7 @@
                 <a:latin typeface="Meiryo"/>
                 <a:ea typeface="Meiryo"/>
               </a:rPr>
-              <a:t>1回30分×1日最大5回・1回約50組の高い処理能力</a:t>
-            </a:r>
-          </a:p>
-          <a:p>
-            <a:pPr algn="l">
-              <a:spcAft>
-                <a:spcPts val="400"/>
-              </a:spcAft>
-            </a:pPr>
-            <a:r>
-              <a:rPr sz="1150" b="0">
-                <a:solidFill>
-                  <a:srgbClr val="1A1A1A"/>
-                </a:solidFill>
-                <a:latin typeface="Meiryo"/>
-                <a:ea typeface="Meiryo"/>
-              </a:rPr>
-              <a:t>「空・宇宙」の世界観は通信サービスの訴求とも高い親和性</a:t>
+              <a:t>1回30分×1日最大5回・1回約50組</a:t>
             </a:r>
           </a:p>
         </p:txBody>
@@ -5101,7 +5081,7 @@
                 <a:latin typeface="Meiryo"/>
                 <a:ea typeface="Meiryo"/>
               </a:rPr>
-              <a:t>7/17お打ち合わせを受け、全量・半分・3IP分割(約1/3)の3規模でご提示します(単価は共通:IP使用料2,000万円/着ぐるみ20万円/ロイヤリティ20%)</a:t>
+              <a:t>7/17お打ち合わせを受け、全量・半分・3IP分割(約1/3)の3規模でご提示します(単価は共通:IP使用料は初年度特別2,000万円(通常2,400万円)/着ぐるみ20万円/ロイヤリティ20%)</a:t>
             </a:r>
           </a:p>
         </p:txBody>
@@ -6115,7 +6095,7 @@
                 <a:latin typeface="Meiryo"/>
                 <a:ea typeface="Meiryo"/>
               </a:rPr>
-              <a:t>※②は土日2日間・ディレクター+アクター2名体制。首都圏内は交通実費込みの特別条件、首都圏外は交通・宿泊実費を別途申し受けます。</a:t>
+              <a:t>※②は土日2日間・ディレクター+スーツアクター2名体制。着ぐるみ運搬・交通・宿泊費、スタッフ昼食費等の実費を別途申し受けます。</a:t>
             </a:r>
           </a:p>
         </p:txBody>
@@ -6197,7 +6177,7 @@
                 <a:latin typeface="Meiryo"/>
                 <a:ea typeface="Meiryo"/>
               </a:rPr>
-              <a:t>今期スポットテストのご提案(回数ベース・地域自由)</a:t>
+              <a:t>今期スポットテストのご提案(回数ベース・関東エリア)</a:t>
             </a:r>
           </a:p>
         </p:txBody>
@@ -6237,7 +6217,7 @@
                 <a:latin typeface="Meiryo"/>
                 <a:ea typeface="Meiryo"/>
               </a:rPr>
-              <a:t>年間のお取り組みとは切り離した単発テストです。着ぐるみを用いる2形式をご用意しました</a:t>
+              <a:t>年間のお取り組みとは切り離した単発テストです。撮影、ステージショーの2形式をご用意しました</a:t>
             </a:r>
           </a:p>
         </p:txBody>
@@ -6635,7 +6615,7 @@
                           <a:latin typeface="Meiryo"/>
                           <a:ea typeface="Meiryo"/>
                         </a:rPr>
-                        <a:t>100万円/開催(IP許諾・監修・スーツ・アクター・輸送込み)</a:t>
+                        <a:t>100万円/開催(IP利用込み・監修・スーツアクター・運搬込み)</a:t>
                       </a:r>
                     </a:p>
                   </a:txBody>
@@ -6658,7 +6638,7 @@
                           <a:latin typeface="Meiryo"/>
                           <a:ea typeface="Meiryo"/>
                         </a:rPr>
-                        <a:t>150万円/開催(ショー演出・音源・追加スタッフ込み)</a:t>
+                        <a:t>200万円/開催(ショー演出・音源・追加スタッフ込み)</a:t>
                       </a:r>
                     </a:p>
                   </a:txBody>
@@ -6848,7 +6828,7 @@
                           <a:latin typeface="Meiryo"/>
                           <a:ea typeface="Meiryo"/>
                         </a:rPr>
-                        <a:t>全国対応可(関東に限定しません)</a:t>
+                        <a:t>関東エリア</a:t>
                       </a:r>
                     </a:p>
                   </a:txBody>
@@ -6931,7 +6911,7 @@
                 <a:latin typeface="Meiryo"/>
                 <a:ea typeface="Meiryo"/>
               </a:rPr>
-              <a:t>エリア・施設タイプの異なる5施設で実施し、集客・送客効果を比較検証(S1×5施設=総額500万円・IP使用料不要)。</a:t>
+              <a:t>エリア・施設タイプの異なる5施設で実施し、集客・送客効果を比較検証(S1×5施設=総額500万円・IP使用料込み)。</a:t>
             </a:r>
           </a:p>
           <a:p>
@@ -6985,7 +6965,7 @@
                 <a:latin typeface="Meiryo"/>
                 <a:ea typeface="Meiryo"/>
               </a:rPr>
-              <a:t>当社の既存ライセンス条件の調整を経て、実施時期・会場を確定します(調整は当社にて速やかに進めます)。測定項目:来場数・撮影参加組数・ブース送客数。</a:t>
+              <a:t>当社の既存ライセンス条件の調整を経て、実施時期・会場を確定します(調整は当社にて速やかに進めます)。</a:t>
             </a:r>
           </a:p>
           <a:p>
@@ -7002,7 +6982,1365 @@
                 <a:latin typeface="Meiryo"/>
                 <a:ea typeface="Meiryo"/>
               </a:rPr>
-              <a:t>※通常イベントキットを用いるテストはキット製作を伴うため来年度からのご提案。※本テスト費用は、年間ご契約成立時に翌年度IP使用料へ充当するご相談が可能です。</a:t>
+              <a:t>※通常イベントキットを用いるテストはキット製作を伴うため来年度からのご提案。</a:t>
+            </a:r>
+          </a:p>
+        </p:txBody>
+      </p:sp>
+    </p:spTree>
+  </p:cSld>
+  <p:clrMapOvr>
+    <a:masterClrMapping/>
+  </p:clrMapOvr>
+</p:sld>
+</file>
+
+<file path=ppt/slides/slide6.xml><?xml version="1.0" encoding="utf-8"?>
+<p:sld xmlns:a="http://schemas.openxmlformats.org/drawingml/2006/main" xmlns:p="http://schemas.openxmlformats.org/presentationml/2006/main" xmlns:r="http://schemas.openxmlformats.org/officeDocument/2006/relationships">
+  <p:cSld>
+    <p:spTree>
+      <p:nvGrpSpPr>
+        <p:cNvPr id="1" name=""/>
+        <p:cNvGrpSpPr/>
+        <p:nvPr/>
+      </p:nvGrpSpPr>
+      <p:grpSpPr/>
+      <p:pic>
+        <p:nvPicPr>
+          <p:cNvPr id="2" name="Picture 1" descr="band_header.png"/>
+          <p:cNvPicPr>
+            <a:picLocks noChangeAspect="1"/>
+          </p:cNvPicPr>
+          <p:nvPr/>
+        </p:nvPicPr>
+        <p:blipFill>
+          <a:blip r:embed="rId2"/>
+          <a:stretch>
+            <a:fillRect/>
+          </a:stretch>
+        </p:blipFill>
+        <p:spPr>
+          <a:xfrm>
+            <a:off x="0" y="0"/>
+            <a:ext cx="12191695" cy="786384"/>
+          </a:xfrm>
+          <a:prstGeom prst="rect">
+            <a:avLst/>
+          </a:prstGeom>
+        </p:spPr>
+      </p:pic>
+      <p:sp>
+        <p:nvSpPr>
+          <p:cNvPr id="3" name="TextBox 2"/>
+          <p:cNvSpPr txBox="1"/>
+          <p:nvPr/>
+        </p:nvSpPr>
+        <p:spPr>
+          <a:xfrm>
+            <a:off x="457200" y="73152"/>
+            <a:ext cx="10241280" cy="640080"/>
+          </a:xfrm>
+          <a:prstGeom prst="rect">
+            <a:avLst/>
+          </a:prstGeom>
+          <a:noFill/>
+        </p:spPr>
+        <p:txBody>
+          <a:bodyPr wrap="square" anchor="ctr" lIns="0" rIns="0" tIns="0" bIns="0">
+            <a:spAutoFit/>
+          </a:bodyPr>
+          <a:lstStyle/>
+          <a:p>
+            <a:pPr algn="l">
+              <a:spcAft>
+                <a:spcPts val="500"/>
+              </a:spcAft>
+            </a:pPr>
+            <a:r>
+              <a:rPr sz="2100" b="1">
+                <a:solidFill>
+                  <a:srgbClr val="FFFFFF"/>
+                </a:solidFill>
+                <a:latin typeface="Meiryo"/>
+                <a:ea typeface="Meiryo"/>
+              </a:rPr>
+              <a:t>ご留意事項:実施可否とキャンセル料</a:t>
+            </a:r>
+          </a:p>
+        </p:txBody>
+      </p:sp>
+      <p:sp>
+        <p:nvSpPr>
+          <p:cNvPr id="4" name="TextBox 3"/>
+          <p:cNvSpPr txBox="1"/>
+          <p:nvPr/>
+        </p:nvSpPr>
+        <p:spPr>
+          <a:xfrm>
+            <a:off x="502920" y="896112"/>
+            <a:ext cx="11155680" cy="365760"/>
+          </a:xfrm>
+          <a:prstGeom prst="rect">
+            <a:avLst/>
+          </a:prstGeom>
+          <a:noFill/>
+        </p:spPr>
+        <p:txBody>
+          <a:bodyPr wrap="square" anchor="t" lIns="0" rIns="0" tIns="0" bIns="0">
+            <a:spAutoFit/>
+          </a:bodyPr>
+          <a:lstStyle/>
+          <a:p>
+            <a:pPr algn="l">
+              <a:spcAft>
+                <a:spcPts val="500"/>
+              </a:spcAft>
+            </a:pPr>
+            <a:r>
+              <a:rPr sz="1250" b="0">
+                <a:solidFill>
+                  <a:srgbClr val="5A626B"/>
+                </a:solidFill>
+                <a:latin typeface="Meiryo"/>
+                <a:ea typeface="Meiryo"/>
+              </a:rPr>
+              <a:t>イベントがお受けできない場合と、実施決定後のキャンセル料についてご確認ください</a:t>
+            </a:r>
+          </a:p>
+        </p:txBody>
+      </p:sp>
+      <p:sp>
+        <p:nvSpPr>
+          <p:cNvPr id="5" name="TextBox 4"/>
+          <p:cNvSpPr txBox="1"/>
+          <p:nvPr/>
+        </p:nvSpPr>
+        <p:spPr>
+          <a:xfrm>
+            <a:off x="4727448" y="6547104"/>
+            <a:ext cx="2743200" cy="256032"/>
+          </a:xfrm>
+          <a:prstGeom prst="rect">
+            <a:avLst/>
+          </a:prstGeom>
+          <a:noFill/>
+        </p:spPr>
+        <p:txBody>
+          <a:bodyPr wrap="square" anchor="t" lIns="0" rIns="0" tIns="0" bIns="0">
+            <a:spAutoFit/>
+          </a:bodyPr>
+          <a:lstStyle/>
+          <a:p>
+            <a:pPr algn="ctr">
+              <a:spcAft>
+                <a:spcPts val="500"/>
+              </a:spcAft>
+            </a:pPr>
+            <a:r>
+              <a:rPr sz="800" b="0">
+                <a:solidFill>
+                  <a:srgbClr val="8E949B"/>
+                </a:solidFill>
+                <a:latin typeface="Meiryo"/>
+                <a:ea typeface="Meiryo"/>
+              </a:rPr>
+              <a:t>© TSUBURAYA PRODUCTIONS</a:t>
+            </a:r>
+          </a:p>
+        </p:txBody>
+      </p:sp>
+      <p:sp>
+        <p:nvSpPr>
+          <p:cNvPr id="6" name="TextBox 5"/>
+          <p:cNvSpPr txBox="1"/>
+          <p:nvPr/>
+        </p:nvSpPr>
+        <p:spPr>
+          <a:xfrm>
+            <a:off x="9372600" y="6492240"/>
+            <a:ext cx="2011680" cy="274320"/>
+          </a:xfrm>
+          <a:prstGeom prst="rect">
+            <a:avLst/>
+          </a:prstGeom>
+          <a:noFill/>
+        </p:spPr>
+        <p:txBody>
+          <a:bodyPr wrap="square" anchor="t" lIns="0" rIns="0" tIns="0" bIns="0">
+            <a:spAutoFit/>
+          </a:bodyPr>
+          <a:lstStyle/>
+          <a:p>
+            <a:pPr algn="r">
+              <a:spcAft>
+                <a:spcPts val="500"/>
+              </a:spcAft>
+            </a:pPr>
+            <a:r>
+              <a:rPr sz="1000" b="1">
+                <a:solidFill>
+                  <a:srgbClr val="C00000"/>
+                </a:solidFill>
+                <a:latin typeface="Meiryo"/>
+                <a:ea typeface="Meiryo"/>
+              </a:rPr>
+              <a:t>Strictly Confidential</a:t>
+            </a:r>
+          </a:p>
+        </p:txBody>
+      </p:sp>
+      <p:sp>
+        <p:nvSpPr>
+          <p:cNvPr id="7" name="TextBox 6"/>
+          <p:cNvSpPr txBox="1"/>
+          <p:nvPr/>
+        </p:nvSpPr>
+        <p:spPr>
+          <a:xfrm>
+            <a:off x="11521440" y="6492240"/>
+            <a:ext cx="457200" cy="274320"/>
+          </a:xfrm>
+          <a:prstGeom prst="rect">
+            <a:avLst/>
+          </a:prstGeom>
+          <a:noFill/>
+        </p:spPr>
+        <p:txBody>
+          <a:bodyPr wrap="square" anchor="t" lIns="0" rIns="0" tIns="0" bIns="0">
+            <a:spAutoFit/>
+          </a:bodyPr>
+          <a:lstStyle/>
+          <a:p>
+            <a:pPr algn="r">
+              <a:spcAft>
+                <a:spcPts val="500"/>
+              </a:spcAft>
+            </a:pPr>
+            <a:r>
+              <a:rPr sz="1000" b="0">
+                <a:solidFill>
+                  <a:srgbClr val="8E949B"/>
+                </a:solidFill>
+                <a:latin typeface="Meiryo"/>
+                <a:ea typeface="Meiryo"/>
+              </a:rPr>
+              <a:t>6</a:t>
+            </a:r>
+          </a:p>
+        </p:txBody>
+      </p:sp>
+      <p:sp>
+        <p:nvSpPr>
+          <p:cNvPr id="8" name="Rounded Rectangle 7"/>
+          <p:cNvSpPr/>
+          <p:nvPr/>
+        </p:nvSpPr>
+        <p:spPr>
+          <a:xfrm>
+            <a:off x="640080" y="1463040"/>
+            <a:ext cx="10881360" cy="2331720"/>
+          </a:xfrm>
+          <a:prstGeom prst="roundRect">
+            <a:avLst>
+              <a:gd name="adj" fmla="val 5000"/>
+            </a:avLst>
+          </a:prstGeom>
+          <a:solidFill>
+            <a:srgbClr val="F2F4F6"/>
+          </a:solidFill>
+          <a:ln>
+            <a:noFill/>
+          </a:ln>
+          <a:effectLst/>
+        </p:spPr>
+        <p:style>
+          <a:lnRef idx="1">
+            <a:schemeClr val="accent1"/>
+          </a:lnRef>
+          <a:fillRef idx="3">
+            <a:schemeClr val="accent1"/>
+          </a:fillRef>
+          <a:effectRef idx="2">
+            <a:schemeClr val="accent1"/>
+          </a:effectRef>
+          <a:fontRef idx="minor">
+            <a:schemeClr val="lt1"/>
+          </a:fontRef>
+        </p:style>
+        <p:txBody>
+          <a:bodyPr rtlCol="0" anchor="ctr"/>
+          <a:lstStyle/>
+          <a:p>
+            <a:pPr algn="ctr"/>
+          </a:p>
+        </p:txBody>
+      </p:sp>
+      <p:sp>
+        <p:nvSpPr>
+          <p:cNvPr id="9" name="TextBox 8"/>
+          <p:cNvSpPr txBox="1"/>
+          <p:nvPr/>
+        </p:nvSpPr>
+        <p:spPr>
+          <a:xfrm>
+            <a:off x="914400" y="1645920"/>
+            <a:ext cx="10332720" cy="2011680"/>
+          </a:xfrm>
+          <a:prstGeom prst="rect">
+            <a:avLst/>
+          </a:prstGeom>
+          <a:noFill/>
+        </p:spPr>
+        <p:txBody>
+          <a:bodyPr wrap="square" anchor="t" lIns="0" rIns="0" tIns="0" bIns="0">
+            <a:spAutoFit/>
+          </a:bodyPr>
+          <a:lstStyle/>
+          <a:p>
+            <a:pPr algn="l">
+              <a:spcAft>
+                <a:spcPts val="600"/>
+              </a:spcAft>
+            </a:pPr>
+            <a:r>
+              <a:rPr sz="1400" b="1">
+                <a:solidFill>
+                  <a:srgbClr val="C00000"/>
+                </a:solidFill>
+                <a:latin typeface="Meiryo"/>
+                <a:ea typeface="Meiryo"/>
+              </a:rPr>
+              <a:t>イベントがお受けできない場合について</a:t>
+            </a:r>
+          </a:p>
+          <a:p>
+            <a:pPr algn="l">
+              <a:spcAft>
+                <a:spcPts val="600"/>
+              </a:spcAft>
+            </a:pPr>
+            <a:r>
+              <a:rPr sz="1250" b="1">
+                <a:solidFill>
+                  <a:srgbClr val="1A1A1A"/>
+                </a:solidFill>
+                <a:latin typeface="Meiryo"/>
+                <a:ea typeface="Meiryo"/>
+              </a:rPr>
+              <a:t>・エリアバッティングの場合</a:t>
+            </a:r>
+          </a:p>
+          <a:p>
+            <a:pPr algn="l">
+              <a:spcAft>
+                <a:spcPts val="600"/>
+              </a:spcAft>
+            </a:pPr>
+            <a:r>
+              <a:rPr sz="1200" b="0">
+                <a:solidFill>
+                  <a:srgbClr val="1A1A1A"/>
+                </a:solidFill>
+                <a:latin typeface="Meiryo"/>
+                <a:ea typeface="Meiryo"/>
+              </a:rPr>
+              <a:t>   イベント日前8日間・後5日間、半径8キロ圏内に他イベントがある場合は、イベントの実施が不可となります。</a:t>
+            </a:r>
+          </a:p>
+          <a:p>
+            <a:pPr algn="l">
+              <a:spcAft>
+                <a:spcPts val="600"/>
+              </a:spcAft>
+            </a:pPr>
+            <a:r>
+              <a:rPr sz="1100" b="0">
+                <a:solidFill>
+                  <a:srgbClr val="5A626B"/>
+                </a:solidFill>
+                <a:latin typeface="Meiryo"/>
+                <a:ea typeface="Meiryo"/>
+              </a:rPr>
+              <a:t>   ※バッティング先が競合施設でない場合や、キャラクター違いの場合は、調整したのち実施できる場合がございます。</a:t>
+            </a:r>
+          </a:p>
+          <a:p>
+            <a:pPr algn="l">
+              <a:spcAft>
+                <a:spcPts val="600"/>
+              </a:spcAft>
+            </a:pPr>
+            <a:r>
+              <a:rPr sz="1250" b="1">
+                <a:solidFill>
+                  <a:srgbClr val="1A1A1A"/>
+                </a:solidFill>
+                <a:latin typeface="Meiryo"/>
+                <a:ea typeface="Meiryo"/>
+              </a:rPr>
+              <a:t>・スーツアクターやスタッフが手配できない場合</a:t>
+            </a:r>
+          </a:p>
+        </p:txBody>
+      </p:sp>
+      <p:sp>
+        <p:nvSpPr>
+          <p:cNvPr id="10" name="Rounded Rectangle 9"/>
+          <p:cNvSpPr/>
+          <p:nvPr/>
+        </p:nvSpPr>
+        <p:spPr>
+          <a:xfrm>
+            <a:off x="640080" y="4069080"/>
+            <a:ext cx="10881360" cy="1783080"/>
+          </a:xfrm>
+          <a:prstGeom prst="roundRect">
+            <a:avLst>
+              <a:gd name="adj" fmla="val 5000"/>
+            </a:avLst>
+          </a:prstGeom>
+          <a:solidFill>
+            <a:srgbClr val="FBEAEB"/>
+          </a:solidFill>
+          <a:ln>
+            <a:noFill/>
+          </a:ln>
+          <a:effectLst/>
+        </p:spPr>
+        <p:style>
+          <a:lnRef idx="1">
+            <a:schemeClr val="accent1"/>
+          </a:lnRef>
+          <a:fillRef idx="3">
+            <a:schemeClr val="accent1"/>
+          </a:fillRef>
+          <a:effectRef idx="2">
+            <a:schemeClr val="accent1"/>
+          </a:effectRef>
+          <a:fontRef idx="minor">
+            <a:schemeClr val="lt1"/>
+          </a:fontRef>
+        </p:style>
+        <p:txBody>
+          <a:bodyPr rtlCol="0" anchor="ctr"/>
+          <a:lstStyle/>
+          <a:p>
+            <a:pPr algn="ctr"/>
+          </a:p>
+        </p:txBody>
+      </p:sp>
+      <p:sp>
+        <p:nvSpPr>
+          <p:cNvPr id="11" name="TextBox 10"/>
+          <p:cNvSpPr txBox="1"/>
+          <p:nvPr/>
+        </p:nvSpPr>
+        <p:spPr>
+          <a:xfrm>
+            <a:off x="914400" y="4251960"/>
+            <a:ext cx="10332720" cy="1463040"/>
+          </a:xfrm>
+          <a:prstGeom prst="rect">
+            <a:avLst/>
+          </a:prstGeom>
+          <a:noFill/>
+        </p:spPr>
+        <p:txBody>
+          <a:bodyPr wrap="square" anchor="t" lIns="0" rIns="0" tIns="0" bIns="0">
+            <a:spAutoFit/>
+          </a:bodyPr>
+          <a:lstStyle/>
+          <a:p>
+            <a:pPr algn="l">
+              <a:spcAft>
+                <a:spcPts val="600"/>
+              </a:spcAft>
+            </a:pPr>
+            <a:r>
+              <a:rPr sz="1400" b="1">
+                <a:solidFill>
+                  <a:srgbClr val="C00000"/>
+                </a:solidFill>
+                <a:latin typeface="Meiryo"/>
+                <a:ea typeface="Meiryo"/>
+              </a:rPr>
+              <a:t>キャンセル料について</a:t>
+            </a:r>
+          </a:p>
+          <a:p>
+            <a:pPr algn="l">
+              <a:spcAft>
+                <a:spcPts val="600"/>
+              </a:spcAft>
+            </a:pPr>
+            <a:r>
+              <a:rPr sz="1200" b="0">
+                <a:solidFill>
+                  <a:srgbClr val="1A1A1A"/>
+                </a:solidFill>
+                <a:latin typeface="Meiryo"/>
+                <a:ea typeface="Meiryo"/>
+              </a:rPr>
+              <a:t>イベント実施が決定した後のキャンセルは、キャンセル料が発生いたします。</a:t>
+            </a:r>
+          </a:p>
+          <a:p>
+            <a:pPr algn="l">
+              <a:spcAft>
+                <a:spcPts val="600"/>
+              </a:spcAft>
+            </a:pPr>
+            <a:r>
+              <a:rPr sz="1250" b="1">
+                <a:solidFill>
+                  <a:srgbClr val="1A1A1A"/>
+                </a:solidFill>
+                <a:latin typeface="Meiryo"/>
+                <a:ea typeface="Meiryo"/>
+              </a:rPr>
+              <a:t>・1か月前〜6日前:お見積り金額の30%   ・6日以内:お見積り金額の50%   ・前日:お見積り金額の100%</a:t>
+            </a:r>
+          </a:p>
+        </p:txBody>
+      </p:sp>
+    </p:spTree>
+  </p:cSld>
+  <p:clrMapOvr>
+    <a:masterClrMapping/>
+  </p:clrMapOvr>
+</p:sld>
+</file>
+
+<file path=ppt/slides/slide7.xml><?xml version="1.0" encoding="utf-8"?>
+<p:sld xmlns:a="http://schemas.openxmlformats.org/drawingml/2006/main" xmlns:p="http://schemas.openxmlformats.org/presentationml/2006/main" xmlns:r="http://schemas.openxmlformats.org/officeDocument/2006/relationships">
+  <p:cSld>
+    <p:spTree>
+      <p:nvGrpSpPr>
+        <p:cNvPr id="1" name=""/>
+        <p:cNvGrpSpPr/>
+        <p:nvPr/>
+      </p:nvGrpSpPr>
+      <p:grpSpPr/>
+      <p:pic>
+        <p:nvPicPr>
+          <p:cNvPr id="2" name="Picture 1" descr="band_header.png"/>
+          <p:cNvPicPr>
+            <a:picLocks noChangeAspect="1"/>
+          </p:cNvPicPr>
+          <p:nvPr/>
+        </p:nvPicPr>
+        <p:blipFill>
+          <a:blip r:embed="rId2"/>
+          <a:stretch>
+            <a:fillRect/>
+          </a:stretch>
+        </p:blipFill>
+        <p:spPr>
+          <a:xfrm>
+            <a:off x="0" y="0"/>
+            <a:ext cx="12191695" cy="786384"/>
+          </a:xfrm>
+          <a:prstGeom prst="rect">
+            <a:avLst/>
+          </a:prstGeom>
+        </p:spPr>
+      </p:pic>
+      <p:sp>
+        <p:nvSpPr>
+          <p:cNvPr id="3" name="TextBox 2"/>
+          <p:cNvSpPr txBox="1"/>
+          <p:nvPr/>
+        </p:nvSpPr>
+        <p:spPr>
+          <a:xfrm>
+            <a:off x="457200" y="73152"/>
+            <a:ext cx="10241280" cy="640080"/>
+          </a:xfrm>
+          <a:prstGeom prst="rect">
+            <a:avLst/>
+          </a:prstGeom>
+          <a:noFill/>
+        </p:spPr>
+        <p:txBody>
+          <a:bodyPr wrap="square" anchor="ctr" lIns="0" rIns="0" tIns="0" bIns="0">
+            <a:spAutoFit/>
+          </a:bodyPr>
+          <a:lstStyle/>
+          <a:p>
+            <a:pPr algn="l">
+              <a:spcAft>
+                <a:spcPts val="500"/>
+              </a:spcAft>
+            </a:pPr>
+            <a:r>
+              <a:rPr sz="2100" b="1">
+                <a:solidFill>
+                  <a:srgbClr val="FFFFFF"/>
+                </a:solidFill>
+                <a:latin typeface="Meiryo"/>
+                <a:ea typeface="Meiryo"/>
+              </a:rPr>
+              <a:t>Appendix:お申し込みの流れ</a:t>
+            </a:r>
+          </a:p>
+        </p:txBody>
+      </p:sp>
+      <p:sp>
+        <p:nvSpPr>
+          <p:cNvPr id="4" name="TextBox 3"/>
+          <p:cNvSpPr txBox="1"/>
+          <p:nvPr/>
+        </p:nvSpPr>
+        <p:spPr>
+          <a:xfrm>
+            <a:off x="502920" y="896112"/>
+            <a:ext cx="11155680" cy="365760"/>
+          </a:xfrm>
+          <a:prstGeom prst="rect">
+            <a:avLst/>
+          </a:prstGeom>
+          <a:noFill/>
+        </p:spPr>
+        <p:txBody>
+          <a:bodyPr wrap="square" anchor="t" lIns="0" rIns="0" tIns="0" bIns="0">
+            <a:spAutoFit/>
+          </a:bodyPr>
+          <a:lstStyle/>
+          <a:p>
+            <a:pPr algn="l">
+              <a:spcAft>
+                <a:spcPts val="500"/>
+              </a:spcAft>
+            </a:pPr>
+            <a:r>
+              <a:rPr sz="1250" b="0">
+                <a:solidFill>
+                  <a:srgbClr val="5A626B"/>
+                </a:solidFill>
+                <a:latin typeface="Meiryo"/>
+                <a:ea typeface="Meiryo"/>
+              </a:rPr>
+              <a:t>お申し込みからイベント開催までの4ステップです。イベント会期の2か月前を目安に申請書をご提出ください</a:t>
+            </a:r>
+          </a:p>
+        </p:txBody>
+      </p:sp>
+      <p:sp>
+        <p:nvSpPr>
+          <p:cNvPr id="5" name="TextBox 4"/>
+          <p:cNvSpPr txBox="1"/>
+          <p:nvPr/>
+        </p:nvSpPr>
+        <p:spPr>
+          <a:xfrm>
+            <a:off x="4727448" y="6547104"/>
+            <a:ext cx="2743200" cy="256032"/>
+          </a:xfrm>
+          <a:prstGeom prst="rect">
+            <a:avLst/>
+          </a:prstGeom>
+          <a:noFill/>
+        </p:spPr>
+        <p:txBody>
+          <a:bodyPr wrap="square" anchor="t" lIns="0" rIns="0" tIns="0" bIns="0">
+            <a:spAutoFit/>
+          </a:bodyPr>
+          <a:lstStyle/>
+          <a:p>
+            <a:pPr algn="ctr">
+              <a:spcAft>
+                <a:spcPts val="500"/>
+              </a:spcAft>
+            </a:pPr>
+            <a:r>
+              <a:rPr sz="800" b="0">
+                <a:solidFill>
+                  <a:srgbClr val="8E949B"/>
+                </a:solidFill>
+                <a:latin typeface="Meiryo"/>
+                <a:ea typeface="Meiryo"/>
+              </a:rPr>
+              <a:t>© TSUBURAYA PRODUCTIONS</a:t>
+            </a:r>
+          </a:p>
+        </p:txBody>
+      </p:sp>
+      <p:sp>
+        <p:nvSpPr>
+          <p:cNvPr id="6" name="TextBox 5"/>
+          <p:cNvSpPr txBox="1"/>
+          <p:nvPr/>
+        </p:nvSpPr>
+        <p:spPr>
+          <a:xfrm>
+            <a:off x="9372600" y="6492240"/>
+            <a:ext cx="2011680" cy="274320"/>
+          </a:xfrm>
+          <a:prstGeom prst="rect">
+            <a:avLst/>
+          </a:prstGeom>
+          <a:noFill/>
+        </p:spPr>
+        <p:txBody>
+          <a:bodyPr wrap="square" anchor="t" lIns="0" rIns="0" tIns="0" bIns="0">
+            <a:spAutoFit/>
+          </a:bodyPr>
+          <a:lstStyle/>
+          <a:p>
+            <a:pPr algn="r">
+              <a:spcAft>
+                <a:spcPts val="500"/>
+              </a:spcAft>
+            </a:pPr>
+            <a:r>
+              <a:rPr sz="1000" b="1">
+                <a:solidFill>
+                  <a:srgbClr val="C00000"/>
+                </a:solidFill>
+                <a:latin typeface="Meiryo"/>
+                <a:ea typeface="Meiryo"/>
+              </a:rPr>
+              <a:t>Strictly Confidential</a:t>
+            </a:r>
+          </a:p>
+        </p:txBody>
+      </p:sp>
+      <p:sp>
+        <p:nvSpPr>
+          <p:cNvPr id="7" name="TextBox 6"/>
+          <p:cNvSpPr txBox="1"/>
+          <p:nvPr/>
+        </p:nvSpPr>
+        <p:spPr>
+          <a:xfrm>
+            <a:off x="11521440" y="6492240"/>
+            <a:ext cx="457200" cy="274320"/>
+          </a:xfrm>
+          <a:prstGeom prst="rect">
+            <a:avLst/>
+          </a:prstGeom>
+          <a:noFill/>
+        </p:spPr>
+        <p:txBody>
+          <a:bodyPr wrap="square" anchor="t" lIns="0" rIns="0" tIns="0" bIns="0">
+            <a:spAutoFit/>
+          </a:bodyPr>
+          <a:lstStyle/>
+          <a:p>
+            <a:pPr algn="r">
+              <a:spcAft>
+                <a:spcPts val="500"/>
+              </a:spcAft>
+            </a:pPr>
+            <a:r>
+              <a:rPr sz="1000" b="0">
+                <a:solidFill>
+                  <a:srgbClr val="8E949B"/>
+                </a:solidFill>
+                <a:latin typeface="Meiryo"/>
+                <a:ea typeface="Meiryo"/>
+              </a:rPr>
+              <a:t>7</a:t>
+            </a:r>
+          </a:p>
+        </p:txBody>
+      </p:sp>
+      <p:sp>
+        <p:nvSpPr>
+          <p:cNvPr id="8" name="Rounded Rectangle 7"/>
+          <p:cNvSpPr/>
+          <p:nvPr/>
+        </p:nvSpPr>
+        <p:spPr>
+          <a:xfrm>
+            <a:off x="640080" y="1463040"/>
+            <a:ext cx="6675120" cy="914400"/>
+          </a:xfrm>
+          <a:prstGeom prst="roundRect">
+            <a:avLst>
+              <a:gd name="adj" fmla="val 12000"/>
+            </a:avLst>
+          </a:prstGeom>
+          <a:solidFill>
+            <a:srgbClr val="F2F4F6"/>
+          </a:solidFill>
+          <a:ln>
+            <a:noFill/>
+          </a:ln>
+          <a:effectLst/>
+        </p:spPr>
+        <p:style>
+          <a:lnRef idx="1">
+            <a:schemeClr val="accent1"/>
+          </a:lnRef>
+          <a:fillRef idx="3">
+            <a:schemeClr val="accent1"/>
+          </a:fillRef>
+          <a:effectRef idx="2">
+            <a:schemeClr val="accent1"/>
+          </a:effectRef>
+          <a:fontRef idx="minor">
+            <a:schemeClr val="lt1"/>
+          </a:fontRef>
+        </p:style>
+        <p:txBody>
+          <a:bodyPr rtlCol="0" anchor="ctr"/>
+          <a:lstStyle/>
+          <a:p>
+            <a:pPr algn="ctr"/>
+          </a:p>
+        </p:txBody>
+      </p:sp>
+      <p:sp>
+        <p:nvSpPr>
+          <p:cNvPr id="9" name="TextBox 8"/>
+          <p:cNvSpPr txBox="1"/>
+          <p:nvPr/>
+        </p:nvSpPr>
+        <p:spPr>
+          <a:xfrm>
+            <a:off x="914400" y="1581912"/>
+            <a:ext cx="6309360" cy="731520"/>
+          </a:xfrm>
+          <a:prstGeom prst="rect">
+            <a:avLst/>
+          </a:prstGeom>
+          <a:noFill/>
+        </p:spPr>
+        <p:txBody>
+          <a:bodyPr wrap="square" anchor="t" lIns="0" rIns="0" tIns="0" bIns="0">
+            <a:spAutoFit/>
+          </a:bodyPr>
+          <a:lstStyle/>
+          <a:p>
+            <a:pPr algn="l">
+              <a:spcAft>
+                <a:spcPts val="300"/>
+              </a:spcAft>
+            </a:pPr>
+            <a:r>
+              <a:rPr sz="1300" b="1">
+                <a:solidFill>
+                  <a:srgbClr val="232278"/>
+                </a:solidFill>
+                <a:latin typeface="Meiryo"/>
+                <a:ea typeface="Meiryo"/>
+              </a:rPr>
+              <a:t>STEP 1  イベント開催申請書の提出</a:t>
+            </a:r>
+          </a:p>
+          <a:p>
+            <a:pPr algn="l">
+              <a:spcAft>
+                <a:spcPts val="300"/>
+              </a:spcAft>
+            </a:pPr>
+            <a:r>
+              <a:rPr sz="1100" b="0">
+                <a:solidFill>
+                  <a:srgbClr val="5A626B"/>
+                </a:solidFill>
+                <a:latin typeface="Meiryo"/>
+                <a:ea typeface="Meiryo"/>
+              </a:rPr>
+              <a:t>イベント会期の2か月前が目安(申請内容の詳細は別紙をご参照ください)</a:t>
+            </a:r>
+          </a:p>
+        </p:txBody>
+      </p:sp>
+      <p:sp>
+        <p:nvSpPr>
+          <p:cNvPr id="10" name="Rounded Rectangle 9"/>
+          <p:cNvSpPr/>
+          <p:nvPr/>
+        </p:nvSpPr>
+        <p:spPr>
+          <a:xfrm>
+            <a:off x="640080" y="2578608"/>
+            <a:ext cx="6675120" cy="914400"/>
+          </a:xfrm>
+          <a:prstGeom prst="roundRect">
+            <a:avLst>
+              <a:gd name="adj" fmla="val 12000"/>
+            </a:avLst>
+          </a:prstGeom>
+          <a:solidFill>
+            <a:srgbClr val="F2F4F6"/>
+          </a:solidFill>
+          <a:ln>
+            <a:noFill/>
+          </a:ln>
+          <a:effectLst/>
+        </p:spPr>
+        <p:style>
+          <a:lnRef idx="1">
+            <a:schemeClr val="accent1"/>
+          </a:lnRef>
+          <a:fillRef idx="3">
+            <a:schemeClr val="accent1"/>
+          </a:fillRef>
+          <a:effectRef idx="2">
+            <a:schemeClr val="accent1"/>
+          </a:effectRef>
+          <a:fontRef idx="minor">
+            <a:schemeClr val="lt1"/>
+          </a:fontRef>
+        </p:style>
+        <p:txBody>
+          <a:bodyPr rtlCol="0" anchor="ctr"/>
+          <a:lstStyle/>
+          <a:p>
+            <a:pPr algn="ctr"/>
+          </a:p>
+        </p:txBody>
+      </p:sp>
+      <p:sp>
+        <p:nvSpPr>
+          <p:cNvPr id="11" name="TextBox 10"/>
+          <p:cNvSpPr txBox="1"/>
+          <p:nvPr/>
+        </p:nvSpPr>
+        <p:spPr>
+          <a:xfrm>
+            <a:off x="914400" y="2697480"/>
+            <a:ext cx="6309360" cy="731520"/>
+          </a:xfrm>
+          <a:prstGeom prst="rect">
+            <a:avLst/>
+          </a:prstGeom>
+          <a:noFill/>
+        </p:spPr>
+        <p:txBody>
+          <a:bodyPr wrap="square" anchor="t" lIns="0" rIns="0" tIns="0" bIns="0">
+            <a:spAutoFit/>
+          </a:bodyPr>
+          <a:lstStyle/>
+          <a:p>
+            <a:pPr algn="l">
+              <a:spcAft>
+                <a:spcPts val="300"/>
+              </a:spcAft>
+            </a:pPr>
+            <a:r>
+              <a:rPr sz="1300" b="1">
+                <a:solidFill>
+                  <a:srgbClr val="232278"/>
+                </a:solidFill>
+                <a:latin typeface="Meiryo"/>
+                <a:ea typeface="Meiryo"/>
+              </a:rPr>
+              <a:t>STEP 2  仮押さえ</a:t>
+            </a:r>
+          </a:p>
+          <a:p>
+            <a:pPr algn="l">
+              <a:spcAft>
+                <a:spcPts val="300"/>
+              </a:spcAft>
+            </a:pPr>
+            <a:r>
+              <a:rPr sz="1100" b="0">
+                <a:solidFill>
+                  <a:srgbClr val="5A626B"/>
+                </a:solidFill>
+                <a:latin typeface="Meiryo"/>
+                <a:ea typeface="Meiryo"/>
+              </a:rPr>
+              <a:t>エリアバッティング確認OKの場合、エリア・キャラクター・スタッフを仮押さえで手配</a:t>
+            </a:r>
+          </a:p>
+        </p:txBody>
+      </p:sp>
+      <p:sp>
+        <p:nvSpPr>
+          <p:cNvPr id="12" name="Rounded Rectangle 11"/>
+          <p:cNvSpPr/>
+          <p:nvPr/>
+        </p:nvSpPr>
+        <p:spPr>
+          <a:xfrm>
+            <a:off x="640080" y="3694176"/>
+            <a:ext cx="6675120" cy="914400"/>
+          </a:xfrm>
+          <a:prstGeom prst="roundRect">
+            <a:avLst>
+              <a:gd name="adj" fmla="val 12000"/>
+            </a:avLst>
+          </a:prstGeom>
+          <a:solidFill>
+            <a:srgbClr val="F2F4F6"/>
+          </a:solidFill>
+          <a:ln>
+            <a:noFill/>
+          </a:ln>
+          <a:effectLst/>
+        </p:spPr>
+        <p:style>
+          <a:lnRef idx="1">
+            <a:schemeClr val="accent1"/>
+          </a:lnRef>
+          <a:fillRef idx="3">
+            <a:schemeClr val="accent1"/>
+          </a:fillRef>
+          <a:effectRef idx="2">
+            <a:schemeClr val="accent1"/>
+          </a:effectRef>
+          <a:fontRef idx="minor">
+            <a:schemeClr val="lt1"/>
+          </a:fontRef>
+        </p:style>
+        <p:txBody>
+          <a:bodyPr rtlCol="0" anchor="ctr"/>
+          <a:lstStyle/>
+          <a:p>
+            <a:pPr algn="ctr"/>
+          </a:p>
+        </p:txBody>
+      </p:sp>
+      <p:sp>
+        <p:nvSpPr>
+          <p:cNvPr id="13" name="TextBox 12"/>
+          <p:cNvSpPr txBox="1"/>
+          <p:nvPr/>
+        </p:nvSpPr>
+        <p:spPr>
+          <a:xfrm>
+            <a:off x="914400" y="3813048"/>
+            <a:ext cx="6309360" cy="731520"/>
+          </a:xfrm>
+          <a:prstGeom prst="rect">
+            <a:avLst/>
+          </a:prstGeom>
+          <a:noFill/>
+        </p:spPr>
+        <p:txBody>
+          <a:bodyPr wrap="square" anchor="t" lIns="0" rIns="0" tIns="0" bIns="0">
+            <a:spAutoFit/>
+          </a:bodyPr>
+          <a:lstStyle/>
+          <a:p>
+            <a:pPr algn="l">
+              <a:spcAft>
+                <a:spcPts val="300"/>
+              </a:spcAft>
+            </a:pPr>
+            <a:r>
+              <a:rPr sz="1300" b="1">
+                <a:solidFill>
+                  <a:srgbClr val="232278"/>
+                </a:solidFill>
+                <a:latin typeface="Meiryo"/>
+                <a:ea typeface="Meiryo"/>
+              </a:rPr>
+              <a:t>STEP 3  イベント決定・キャンセルの連絡</a:t>
+            </a:r>
+          </a:p>
+          <a:p>
+            <a:pPr algn="l">
+              <a:spcAft>
+                <a:spcPts val="300"/>
+              </a:spcAft>
+            </a:pPr>
+            <a:r>
+              <a:rPr sz="1100" b="0">
+                <a:solidFill>
+                  <a:srgbClr val="5A626B"/>
+                </a:solidFill>
+                <a:latin typeface="Meiryo"/>
+                <a:ea typeface="Meiryo"/>
+              </a:rPr>
+              <a:t>イベント会期の1か月前までに、決定・キャンセルのご連絡をお願いします</a:t>
+            </a:r>
+          </a:p>
+        </p:txBody>
+      </p:sp>
+      <p:sp>
+        <p:nvSpPr>
+          <p:cNvPr id="14" name="Rounded Rectangle 13"/>
+          <p:cNvSpPr/>
+          <p:nvPr/>
+        </p:nvSpPr>
+        <p:spPr>
+          <a:xfrm>
+            <a:off x="640080" y="4809744"/>
+            <a:ext cx="6675120" cy="914400"/>
+          </a:xfrm>
+          <a:prstGeom prst="roundRect">
+            <a:avLst>
+              <a:gd name="adj" fmla="val 12000"/>
+            </a:avLst>
+          </a:prstGeom>
+          <a:solidFill>
+            <a:srgbClr val="F2F4F6"/>
+          </a:solidFill>
+          <a:ln>
+            <a:noFill/>
+          </a:ln>
+          <a:effectLst/>
+        </p:spPr>
+        <p:style>
+          <a:lnRef idx="1">
+            <a:schemeClr val="accent1"/>
+          </a:lnRef>
+          <a:fillRef idx="3">
+            <a:schemeClr val="accent1"/>
+          </a:fillRef>
+          <a:effectRef idx="2">
+            <a:schemeClr val="accent1"/>
+          </a:effectRef>
+          <a:fontRef idx="minor">
+            <a:schemeClr val="lt1"/>
+          </a:fontRef>
+        </p:style>
+        <p:txBody>
+          <a:bodyPr rtlCol="0" anchor="ctr"/>
+          <a:lstStyle/>
+          <a:p>
+            <a:pPr algn="ctr"/>
+          </a:p>
+        </p:txBody>
+      </p:sp>
+      <p:sp>
+        <p:nvSpPr>
+          <p:cNvPr id="15" name="TextBox 14"/>
+          <p:cNvSpPr txBox="1"/>
+          <p:nvPr/>
+        </p:nvSpPr>
+        <p:spPr>
+          <a:xfrm>
+            <a:off x="914400" y="4928616"/>
+            <a:ext cx="6309360" cy="731520"/>
+          </a:xfrm>
+          <a:prstGeom prst="rect">
+            <a:avLst/>
+          </a:prstGeom>
+          <a:noFill/>
+        </p:spPr>
+        <p:txBody>
+          <a:bodyPr wrap="square" anchor="t" lIns="0" rIns="0" tIns="0" bIns="0">
+            <a:spAutoFit/>
+          </a:bodyPr>
+          <a:lstStyle/>
+          <a:p>
+            <a:pPr algn="l">
+              <a:spcAft>
+                <a:spcPts val="300"/>
+              </a:spcAft>
+            </a:pPr>
+            <a:r>
+              <a:rPr sz="1300" b="1">
+                <a:solidFill>
+                  <a:srgbClr val="232278"/>
+                </a:solidFill>
+                <a:latin typeface="Meiryo"/>
+                <a:ea typeface="Meiryo"/>
+              </a:rPr>
+              <a:t>STEP 4  正式決定・開催</a:t>
+            </a:r>
+          </a:p>
+          <a:p>
+            <a:pPr algn="l">
+              <a:spcAft>
+                <a:spcPts val="300"/>
+              </a:spcAft>
+            </a:pPr>
+            <a:r>
+              <a:rPr sz="1100" b="0">
+                <a:solidFill>
+                  <a:srgbClr val="5A626B"/>
+                </a:solidFill>
+                <a:latin typeface="Meiryo"/>
+                <a:ea typeface="Meiryo"/>
+              </a:rPr>
+              <a:t>実施に向け正式に手配。これ以降のキャンセルは規定のキャンセル料が発生します</a:t>
+            </a:r>
+          </a:p>
+        </p:txBody>
+      </p:sp>
+      <p:sp>
+        <p:nvSpPr>
+          <p:cNvPr id="16" name="Rounded Rectangle 15"/>
+          <p:cNvSpPr/>
+          <p:nvPr/>
+        </p:nvSpPr>
+        <p:spPr>
+          <a:xfrm>
+            <a:off x="7589520" y="1463040"/>
+            <a:ext cx="3931920" cy="4443984"/>
+          </a:xfrm>
+          <a:prstGeom prst="roundRect">
+            <a:avLst>
+              <a:gd name="adj" fmla="val 5000"/>
+            </a:avLst>
+          </a:prstGeom>
+          <a:solidFill>
+            <a:srgbClr val="FBEAEB"/>
+          </a:solidFill>
+          <a:ln>
+            <a:noFill/>
+          </a:ln>
+          <a:effectLst/>
+        </p:spPr>
+        <p:style>
+          <a:lnRef idx="1">
+            <a:schemeClr val="accent1"/>
+          </a:lnRef>
+          <a:fillRef idx="3">
+            <a:schemeClr val="accent1"/>
+          </a:fillRef>
+          <a:effectRef idx="2">
+            <a:schemeClr val="accent1"/>
+          </a:effectRef>
+          <a:fontRef idx="minor">
+            <a:schemeClr val="lt1"/>
+          </a:fontRef>
+        </p:style>
+        <p:txBody>
+          <a:bodyPr rtlCol="0" anchor="ctr"/>
+          <a:lstStyle/>
+          <a:p>
+            <a:pPr algn="ctr"/>
+          </a:p>
+        </p:txBody>
+      </p:sp>
+      <p:sp>
+        <p:nvSpPr>
+          <p:cNvPr id="17" name="TextBox 16"/>
+          <p:cNvSpPr txBox="1"/>
+          <p:nvPr/>
+        </p:nvSpPr>
+        <p:spPr>
+          <a:xfrm>
+            <a:off x="7863840" y="1691640"/>
+            <a:ext cx="3474720" cy="4023360"/>
+          </a:xfrm>
+          <a:prstGeom prst="rect">
+            <a:avLst/>
+          </a:prstGeom>
+          <a:noFill/>
+        </p:spPr>
+        <p:txBody>
+          <a:bodyPr wrap="square" anchor="t" lIns="0" rIns="0" tIns="0" bIns="0">
+            <a:spAutoFit/>
+          </a:bodyPr>
+          <a:lstStyle/>
+          <a:p>
+            <a:pPr algn="l">
+              <a:spcAft>
+                <a:spcPts val="600"/>
+              </a:spcAft>
+            </a:pPr>
+            <a:r>
+              <a:rPr sz="1250" b="1">
+                <a:solidFill>
+                  <a:srgbClr val="C00000"/>
+                </a:solidFill>
+                <a:latin typeface="Meiryo"/>
+                <a:ea typeface="Meiryo"/>
+              </a:rPr>
+              <a:t>エリアバッティングとは</a:t>
+            </a:r>
+          </a:p>
+          <a:p>
+            <a:pPr algn="l">
+              <a:spcAft>
+                <a:spcPts val="600"/>
+              </a:spcAft>
+            </a:pPr>
+            <a:r>
+              <a:rPr sz="1100" b="0">
+                <a:solidFill>
+                  <a:srgbClr val="1A1A1A"/>
+                </a:solidFill>
+                <a:latin typeface="Meiryo"/>
+                <a:ea typeface="Meiryo"/>
+              </a:rPr>
+              <a:t>近隣でウルトラマンイベントの実施予定がある場合、出演NGとなります。</a:t>
+            </a:r>
+          </a:p>
+          <a:p>
+            <a:pPr algn="l">
+              <a:spcAft>
+                <a:spcPts val="600"/>
+              </a:spcAft>
+            </a:pPr>
+            <a:r>
+              <a:rPr sz="1250" b="1">
+                <a:solidFill>
+                  <a:srgbClr val="C00000"/>
+                </a:solidFill>
+                <a:latin typeface="Meiryo"/>
+                <a:ea typeface="Meiryo"/>
+              </a:rPr>
+              <a:t>キャンセル料</a:t>
+            </a:r>
+          </a:p>
+          <a:p>
+            <a:pPr algn="l">
+              <a:spcAft>
+                <a:spcPts val="600"/>
+              </a:spcAft>
+            </a:pPr>
+            <a:r>
+              <a:rPr sz="1100" b="0">
+                <a:solidFill>
+                  <a:srgbClr val="1A1A1A"/>
+                </a:solidFill>
+                <a:latin typeface="Meiryo"/>
+                <a:ea typeface="Meiryo"/>
+              </a:rPr>
+              <a:t>決定以降のキャンセルはキャンセル料が発生いたします(料率はP6をご参照ください)。</a:t>
+            </a:r>
+          </a:p>
+          <a:p>
+            <a:pPr algn="l">
+              <a:spcAft>
+                <a:spcPts val="600"/>
+              </a:spcAft>
+            </a:pPr>
+            <a:r>
+              <a:rPr sz="1250" b="1">
+                <a:solidFill>
+                  <a:srgbClr val="C00000"/>
+                </a:solidFill>
+                <a:latin typeface="Meiryo"/>
+                <a:ea typeface="Meiryo"/>
+              </a:rPr>
+              <a:t>イベント実施に向けて</a:t>
+            </a:r>
+          </a:p>
+          <a:p>
+            <a:pPr algn="l">
+              <a:spcAft>
+                <a:spcPts val="600"/>
+              </a:spcAft>
+            </a:pPr>
+            <a:r>
+              <a:rPr sz="1100" b="0">
+                <a:solidFill>
+                  <a:srgbClr val="1A1A1A"/>
+                </a:solidFill>
+                <a:latin typeface="Meiryo"/>
+                <a:ea typeface="Meiryo"/>
+              </a:rPr>
+              <a:t>・告知物の監修</a:t>
+            </a:r>
+          </a:p>
+          <a:p>
+            <a:pPr algn="l">
+              <a:spcAft>
+                <a:spcPts val="600"/>
+              </a:spcAft>
+            </a:pPr>
+            <a:r>
+              <a:rPr sz="1100" b="0">
+                <a:solidFill>
+                  <a:srgbClr val="1A1A1A"/>
+                </a:solidFill>
+                <a:latin typeface="Meiryo"/>
+                <a:ea typeface="Meiryo"/>
+              </a:rPr>
+              <a:t>・実施確認書の提出</a:t>
             </a:r>
           </a:p>
         </p:txBody>
